--- a/ChargeSpot.pptx
+++ b/ChargeSpot.pptx
@@ -20,9 +20,9 @@
     <p:sldId id="285" r:id="rId11"/>
     <p:sldId id="323" r:id="rId12"/>
     <p:sldId id="311" r:id="rId13"/>
-    <p:sldId id="318" r:id="rId14"/>
-    <p:sldId id="319" r:id="rId15"/>
-    <p:sldId id="320" r:id="rId16"/>
+    <p:sldId id="324" r:id="rId14"/>
+    <p:sldId id="325" r:id="rId15"/>
+    <p:sldId id="326" r:id="rId16"/>
     <p:sldId id="279" r:id="rId17"/>
   </p:sldIdLst>
   <p:sldSz cx="18288000" cy="10287000"/>
@@ -9580,7 +9580,7 @@
         <p:spPr>
           <a:xfrm>
             <a:off x="1447800" y="2446705"/>
-            <a:ext cx="0" cy="4373195"/>
+            <a:ext cx="0" cy="5975672"/>
           </a:xfrm>
           <a:prstGeom prst="straightConnector1">
             <a:avLst/>
@@ -9612,7 +9612,7 @@
         <p:spPr>
           <a:xfrm>
             <a:off x="1866900" y="2420734"/>
-            <a:ext cx="14554200" cy="4524315"/>
+            <a:ext cx="14554200" cy="6001643"/>
           </a:xfrm>
           <a:prstGeom prst="rect">
             <a:avLst/>
@@ -9726,6 +9726,36 @@
                 </a:solidFill>
               </a:rPr>
               <a:t>Analytics Dashboard &amp; Security: Created Pandas-based data cleaning reports and utilization metrics, supported by secure authentication, email verification, and role-based access control (RBAC).</a:t>
+            </a:r>
+            <a:endParaRPr lang="ar-EG" sz="2400" b="1" dirty="0">
+              <a:solidFill>
+                <a:schemeClr val="bg1"/>
+              </a:solidFill>
+            </a:endParaRPr>
+          </a:p>
+          <a:p>
+            <a:pPr marL="342900" indent="-342900">
+              <a:buFont typeface="Arial" panose="020B0604020202020204" pitchFamily="34" charset="0"/>
+              <a:buChar char="•"/>
+            </a:pPr>
+            <a:endParaRPr lang="ar-EG" sz="2400" b="1" dirty="0">
+              <a:solidFill>
+                <a:schemeClr val="bg1"/>
+              </a:solidFill>
+            </a:endParaRPr>
+          </a:p>
+          <a:p>
+            <a:pPr marL="342900" indent="-342900">
+              <a:buFont typeface="Arial" panose="020B0604020202020204" pitchFamily="34" charset="0"/>
+              <a:buChar char="•"/>
+            </a:pPr>
+            <a:r>
+              <a:rPr lang="en-US" sz="2400" b="1" dirty="0">
+                <a:solidFill>
+                  <a:schemeClr val="bg1"/>
+                </a:solidFill>
+              </a:rPr>
+              <a:t>Smart Station Recommendation: Allows drivers to input personal trip data—such as remaining driving range and desired charging time—enabling the system to intelligently rank and recommend the best available station based on distance, wait times, and charger power.</a:t>
             </a:r>
             <a:endParaRPr lang="ar-EG" sz="2400" b="1" dirty="0">
               <a:solidFill>
@@ -10300,33 +10330,36 @@
       </p:grpSpPr>
       <p:sp>
         <p:nvSpPr>
-          <p:cNvPr id="2" name="Title"/>
-          <p:cNvSpPr/>
+          <p:cNvPr id="5" name="TextBox 4">
+            <a:extLst>
+              <a:ext uri="{FF2B5EF4-FFF2-40B4-BE49-F238E27FC236}">
+                <a16:creationId xmlns:a16="http://schemas.microsoft.com/office/drawing/2014/main" id="{1F676F02-7ABE-8ECA-04A5-CB247D767A5B}"/>
+              </a:ext>
+            </a:extLst>
+          </p:cNvPr>
+          <p:cNvSpPr txBox="1"/>
           <p:nvPr/>
         </p:nvSpPr>
         <p:spPr>
           <a:xfrm>
-            <a:off x="1200150" y="700000"/>
-            <a:ext cx="15887700" cy="900000"/>
+            <a:off x="907774" y="1469335"/>
+            <a:ext cx="9220200" cy="1107996"/>
           </a:xfrm>
           <a:prstGeom prst="rect">
             <a:avLst/>
           </a:prstGeom>
           <a:noFill/>
-          <a:ln>
-            <a:noFill/>
-          </a:ln>
         </p:spPr>
         <p:txBody>
-          <a:bodyPr wrap="square" lIns="0" tIns="0" rIns="0" bIns="0" anchor="t">
-            <a:noAutofit/>
+          <a:bodyPr wrap="square">
+            <a:spAutoFit/>
           </a:bodyPr>
           <a:lstStyle/>
           <a:p>
             <a:r>
-              <a:rPr lang="en-US" sz="4000" b="1" dirty="0">
+              <a:rPr lang="en-US" sz="6600" b="1" dirty="0">
                 <a:solidFill>
-                  <a:srgbClr val="193EB0"/>
+                  <a:schemeClr val="bg1"/>
                 </a:solidFill>
                 <a:latin typeface="Arial"/>
                 <a:ea typeface="Arial"/>
@@ -10339,26 +10372,29 @@
       </p:sp>
       <p:sp>
         <p:nvSpPr>
-          <p:cNvPr id="3" name="Content"/>
-          <p:cNvSpPr/>
+          <p:cNvPr id="2" name="TextBox 1">
+            <a:extLst>
+              <a:ext uri="{FF2B5EF4-FFF2-40B4-BE49-F238E27FC236}">
+                <a16:creationId xmlns:a16="http://schemas.microsoft.com/office/drawing/2014/main" id="{565CA3FC-6695-BB7D-353A-63E580A4E2A8}"/>
+              </a:ext>
+            </a:extLst>
+          </p:cNvPr>
+          <p:cNvSpPr txBox="1"/>
           <p:nvPr/>
         </p:nvSpPr>
         <p:spPr>
           <a:xfrm>
-            <a:off x="1187450" y="419100"/>
-            <a:ext cx="15887700" cy="7687000"/>
+            <a:off x="1066800" y="2705100"/>
+            <a:ext cx="16306800" cy="4216539"/>
           </a:xfrm>
           <a:prstGeom prst="rect">
             <a:avLst/>
           </a:prstGeom>
           <a:noFill/>
-          <a:ln>
-            <a:noFill/>
-          </a:ln>
         </p:spPr>
         <p:txBody>
-          <a:bodyPr wrap="square" lIns="0" tIns="0" rIns="0" bIns="0" anchor="ctr">
-            <a:normAutofit/>
+          <a:bodyPr wrap="square" rtlCol="0">
+            <a:spAutoFit/>
           </a:bodyPr>
           <a:lstStyle/>
           <a:p>
@@ -10367,20 +10403,46 @@
                 <a:spcPts val="1600"/>
               </a:spcAft>
               <a:buClr>
-                <a:srgbClr val="193EB0"/>
+                <a:schemeClr val="bg1"/>
               </a:buClr>
-              <a:buFont typeface="Arial"/>
-              <a:buChar char="●"/>
+              <a:buFont typeface="Arial" panose="020B0604020202020204" pitchFamily="34" charset="0"/>
+              <a:buChar char="•"/>
             </a:pPr>
             <a:r>
-              <a:rPr lang="en-US" sz="3200" b="1" dirty="0"/>
+              <a:rPr lang="en-US" sz="2800" b="1" dirty="0">
+                <a:solidFill>
+                  <a:schemeClr val="bg1"/>
+                </a:solidFill>
+              </a:rPr>
               <a:t>Comprehensive Data Cleaning &amp; Validation: </a:t>
             </a:r>
             <a:r>
-              <a:rPr lang="en-US" sz="3200" dirty="0"/>
+              <a:rPr lang="en-US" sz="2400" dirty="0">
+                <a:solidFill>
+                  <a:schemeClr val="bg1"/>
+                </a:solidFill>
+              </a:rPr>
               <a:t>Successfully ingested and cleaned synthetic datasets containing deliberately injected defects, achieving a 100% detection and correction rate for missing and invalid records.</a:t>
             </a:r>
-            <a:endParaRPr lang="ar-EG" sz="3200" dirty="0"/>
+            <a:endParaRPr lang="ar-EG" sz="2400" dirty="0">
+              <a:solidFill>
+                <a:schemeClr val="bg1"/>
+              </a:solidFill>
+            </a:endParaRPr>
+          </a:p>
+          <a:p>
+            <a:pPr marL="342900" indent="-342900">
+              <a:buClr>
+                <a:schemeClr val="bg1"/>
+              </a:buClr>
+              <a:buFont typeface="Arial" panose="020B0604020202020204" pitchFamily="34" charset="0"/>
+              <a:buChar char="•"/>
+            </a:pPr>
+            <a:endParaRPr lang="en-US" sz="2400" b="1" dirty="0">
+              <a:solidFill>
+                <a:schemeClr val="bg1"/>
+              </a:solidFill>
+            </a:endParaRPr>
           </a:p>
           <a:p>
             <a:pPr marL="457200" indent="-457200">
@@ -10388,20 +10450,46 @@
                 <a:spcPts val="1600"/>
               </a:spcAft>
               <a:buClr>
-                <a:srgbClr val="193EB0"/>
+                <a:schemeClr val="bg1"/>
               </a:buClr>
-              <a:buFont typeface="Arial"/>
-              <a:buChar char="●"/>
+              <a:buFont typeface="Arial" panose="020B0604020202020204" pitchFamily="34" charset="0"/>
+              <a:buChar char="•"/>
             </a:pPr>
             <a:r>
-              <a:rPr lang="en-US" sz="3200" b="1" dirty="0"/>
+              <a:rPr lang="en-US" sz="2800" b="1" dirty="0">
+                <a:solidFill>
+                  <a:schemeClr val="bg1"/>
+                </a:solidFill>
+              </a:rPr>
               <a:t>Key Performance Metrics &amp; Analytics: </a:t>
             </a:r>
             <a:r>
-              <a:rPr lang="en-US" sz="3200" dirty="0"/>
+              <a:rPr lang="en-US" sz="2400" dirty="0">
+                <a:solidFill>
+                  <a:schemeClr val="bg1"/>
+                </a:solidFill>
+              </a:rPr>
               <a:t>Generated actionable operational insights and KPI dashboards using Pandas, tracking peak demand hours, charger utilization rates, cancellation frequencies, and average waiting times across stations.</a:t>
             </a:r>
-            <a:endParaRPr lang="ar-EG" sz="3200" dirty="0"/>
+            <a:endParaRPr lang="ar-EG" sz="2400" dirty="0">
+              <a:solidFill>
+                <a:schemeClr val="bg1"/>
+              </a:solidFill>
+            </a:endParaRPr>
+          </a:p>
+          <a:p>
+            <a:pPr marL="342900" indent="-342900">
+              <a:buClr>
+                <a:schemeClr val="bg1"/>
+              </a:buClr>
+              <a:buFont typeface="Arial" panose="020B0604020202020204" pitchFamily="34" charset="0"/>
+              <a:buChar char="•"/>
+            </a:pPr>
+            <a:endParaRPr lang="en-US" sz="2400" b="1" dirty="0">
+              <a:solidFill>
+                <a:schemeClr val="bg1"/>
+              </a:solidFill>
+            </a:endParaRPr>
           </a:p>
           <a:p>
             <a:pPr marL="457200" indent="-457200">
@@ -10409,34 +10497,61 @@
                 <a:spcPts val="1600"/>
               </a:spcAft>
               <a:buClr>
-                <a:srgbClr val="193EB0"/>
+                <a:schemeClr val="bg1"/>
               </a:buClr>
-              <a:buFont typeface="Arial"/>
-              <a:buChar char="●"/>
+              <a:buFont typeface="Arial" panose="020B0604020202020204" pitchFamily="34" charset="0"/>
+              <a:buChar char="•"/>
             </a:pPr>
             <a:r>
-              <a:rPr lang="en-US" sz="3200" b="1" dirty="0"/>
+              <a:rPr lang="en-US" sz="2800" b="1" dirty="0">
+                <a:solidFill>
+                  <a:schemeClr val="bg1"/>
+                </a:solidFill>
+              </a:rPr>
               <a:t>Algorithmic Efficiency &amp; Reliability: </a:t>
             </a:r>
             <a:r>
-              <a:rPr lang="en-US" sz="3200" dirty="0"/>
+              <a:rPr lang="en-US" sz="2400" dirty="0">
+                <a:solidFill>
+                  <a:schemeClr val="bg1"/>
+                </a:solidFill>
+              </a:rPr>
               <a:t>Validated the high performance of custom algorithms and data structures through 325 automated tests, demonstrating optimal time complexities for searching, sorting, and greedy slot scheduling.</a:t>
             </a:r>
+          </a:p>
+          <a:p>
+            <a:pPr marL="342900" indent="-342900">
+              <a:buClr>
+                <a:schemeClr val="bg1"/>
+              </a:buClr>
+              <a:buFont typeface="Arial" panose="020B0604020202020204" pitchFamily="34" charset="0"/>
+              <a:buChar char="•"/>
+            </a:pPr>
+            <a:endParaRPr lang="en-US" sz="2400" b="1" dirty="0">
+              <a:solidFill>
+                <a:schemeClr val="bg1"/>
+              </a:solidFill>
+            </a:endParaRPr>
           </a:p>
         </p:txBody>
       </p:sp>
     </p:spTree>
+    <p:extLst>
+      <p:ext uri="{BB962C8B-B14F-4D97-AF65-F5344CB8AC3E}">
+        <p14:creationId xmlns:p14="http://schemas.microsoft.com/office/powerpoint/2010/main" val="2621434"/>
+      </p:ext>
+    </p:extLst>
   </p:cSld>
   <p:clrMapOvr>
     <a:masterClrMapping/>
   </p:clrMapOvr>
-  <mc:AlternateContent xmlns:mc="http://schemas.openxmlformats.org/markup-compatibility/2006" xmlns:p14="http://schemas.microsoft.com/office/powerpoint/2010/main">
-    <mc:Choice Requires="p14">
+  <mc:AlternateContent xmlns:mc="http://schemas.openxmlformats.org/markup-compatibility/2006">
+    <mc:Choice xmlns:p14="http://schemas.microsoft.com/office/powerpoint/2010/main" Requires="p14">
       <p:transition spd="med" p14:dur="700">
         <p:fade/>
       </p:transition>
     </mc:Choice>
-    <mc:Fallback xmlns="">
+    <mc:Fallback>
       <p:transition spd="med">
         <p:fade/>
       </p:transition>
@@ -10479,7 +10594,7 @@
                                           </p:stCondLst>
                                         </p:cTn>
                                         <p:tgtEl>
-                                          <p:spTgt spid="3"/>
+                                          <p:spTgt spid="2"/>
                                         </p:tgtEl>
                                         <p:attrNameLst>
                                           <p:attrName>style.visibility</p:attrName>
@@ -10493,7 +10608,7 @@
                                       <p:cBhvr>
                                         <p:cTn id="7" dur="1000"/>
                                         <p:tgtEl>
-                                          <p:spTgt spid="3"/>
+                                          <p:spTgt spid="2"/>
                                         </p:tgtEl>
                                       </p:cBhvr>
                                     </p:animEffect>
@@ -10528,7 +10643,7 @@
       </p:par>
     </p:tnLst>
     <p:bldLst>
-      <p:bldP spid="3" grpId="0"/>
+      <p:bldP spid="2" grpId="0"/>
     </p:bldLst>
   </p:timing>
 </p:sld>
@@ -10553,33 +10668,36 @@
       </p:grpSpPr>
       <p:sp>
         <p:nvSpPr>
-          <p:cNvPr id="2" name="Title"/>
-          <p:cNvSpPr/>
+          <p:cNvPr id="5" name="TextBox 4">
+            <a:extLst>
+              <a:ext uri="{FF2B5EF4-FFF2-40B4-BE49-F238E27FC236}">
+                <a16:creationId xmlns:a16="http://schemas.microsoft.com/office/drawing/2014/main" id="{1F676F02-7ABE-8ECA-04A5-CB247D767A5B}"/>
+              </a:ext>
+            </a:extLst>
+          </p:cNvPr>
+          <p:cNvSpPr txBox="1"/>
           <p:nvPr/>
         </p:nvSpPr>
         <p:spPr>
           <a:xfrm>
-            <a:off x="1200150" y="700000"/>
-            <a:ext cx="15887700" cy="900000"/>
+            <a:off x="907774" y="1469335"/>
+            <a:ext cx="9220200" cy="1107996"/>
           </a:xfrm>
           <a:prstGeom prst="rect">
             <a:avLst/>
           </a:prstGeom>
           <a:noFill/>
-          <a:ln>
-            <a:noFill/>
-          </a:ln>
         </p:spPr>
         <p:txBody>
-          <a:bodyPr wrap="square" lIns="0" tIns="0" rIns="0" bIns="0" anchor="t">
-            <a:noAutofit/>
+          <a:bodyPr wrap="square">
+            <a:spAutoFit/>
           </a:bodyPr>
           <a:lstStyle/>
           <a:p>
             <a:r>
-              <a:rPr lang="en-US" sz="4000" b="1" dirty="0">
+              <a:rPr lang="en-US" sz="6600" b="1" dirty="0">
                 <a:solidFill>
-                  <a:srgbClr val="193EB0"/>
+                  <a:schemeClr val="bg1"/>
                 </a:solidFill>
                 <a:latin typeface="Arial"/>
                 <a:ea typeface="Arial"/>
@@ -10592,26 +10710,29 @@
       </p:sp>
       <p:sp>
         <p:nvSpPr>
-          <p:cNvPr id="3" name="Content"/>
-          <p:cNvSpPr/>
+          <p:cNvPr id="2" name="TextBox 1">
+            <a:extLst>
+              <a:ext uri="{FF2B5EF4-FFF2-40B4-BE49-F238E27FC236}">
+                <a16:creationId xmlns:a16="http://schemas.microsoft.com/office/drawing/2014/main" id="{565CA3FC-6695-BB7D-353A-63E580A4E2A8}"/>
+              </a:ext>
+            </a:extLst>
+          </p:cNvPr>
+          <p:cNvSpPr txBox="1"/>
           <p:nvPr/>
         </p:nvSpPr>
         <p:spPr>
           <a:xfrm>
-            <a:off x="1187450" y="876300"/>
-            <a:ext cx="15887700" cy="7687000"/>
+            <a:off x="1066800" y="2705100"/>
+            <a:ext cx="16306800" cy="2267287"/>
           </a:xfrm>
           <a:prstGeom prst="rect">
             <a:avLst/>
           </a:prstGeom>
           <a:noFill/>
-          <a:ln>
-            <a:noFill/>
-          </a:ln>
         </p:spPr>
         <p:txBody>
-          <a:bodyPr wrap="square" lIns="0" tIns="0" rIns="0" bIns="0" anchor="ctr">
-            <a:normAutofit/>
+          <a:bodyPr wrap="square" rtlCol="0">
+            <a:spAutoFit/>
           </a:bodyPr>
           <a:lstStyle/>
           <a:p>
@@ -10620,23 +10741,49 @@
                 <a:spcPts val="1600"/>
               </a:spcAft>
               <a:buClr>
-                <a:srgbClr val="193EB0"/>
+                <a:schemeClr val="bg1"/>
               </a:buClr>
-              <a:buFont typeface="Arial"/>
-              <a:buChar char="●"/>
+              <a:buFont typeface="Arial" panose="020B0604020202020204" pitchFamily="34" charset="0"/>
+              <a:buChar char="•"/>
             </a:pPr>
             <a:r>
-              <a:rPr lang="en-US" sz="3200" b="1" dirty="0"/>
+              <a:rPr lang="en-US" sz="2800" b="1" dirty="0">
+                <a:solidFill>
+                  <a:schemeClr val="bg1"/>
+                </a:solidFill>
+              </a:rPr>
               <a:t>Successful Project Delivery: </a:t>
             </a:r>
             <a:r>
-              <a:rPr lang="en-US" sz="3200" dirty="0" err="1"/>
+              <a:rPr lang="en-US" sz="2400" dirty="0" err="1">
+                <a:solidFill>
+                  <a:schemeClr val="bg1"/>
+                </a:solidFill>
+              </a:rPr>
               <a:t>ChargeSpot</a:t>
             </a:r>
             <a:r>
-              <a:rPr lang="en-US" sz="3200" dirty="0"/>
+              <a:rPr lang="en-US" sz="2400" dirty="0">
+                <a:solidFill>
+                  <a:schemeClr val="bg1"/>
+                </a:solidFill>
+              </a:rPr>
               <a:t> successfully delivers a robust, full-stack EV charging management platform featuring modular architecture, secure user authentication, and multi-role dashboards.</a:t>
             </a:r>
+          </a:p>
+          <a:p>
+            <a:pPr marL="342900" indent="-342900">
+              <a:buClr>
+                <a:schemeClr val="bg1"/>
+              </a:buClr>
+              <a:buFont typeface="Arial" panose="020B0604020202020204" pitchFamily="34" charset="0"/>
+              <a:buChar char="•"/>
+            </a:pPr>
+            <a:endParaRPr lang="en-US" sz="2400" b="1" dirty="0">
+              <a:solidFill>
+                <a:schemeClr val="bg1"/>
+              </a:solidFill>
+            </a:endParaRPr>
           </a:p>
           <a:p>
             <a:pPr marL="457200" indent="-457200">
@@ -10644,34 +10791,47 @@
                 <a:spcPts val="1600"/>
               </a:spcAft>
               <a:buClr>
-                <a:srgbClr val="193EB0"/>
+                <a:schemeClr val="bg1"/>
               </a:buClr>
-              <a:buFont typeface="Arial"/>
-              <a:buChar char="●"/>
+              <a:buFont typeface="Arial" panose="020B0604020202020204" pitchFamily="34" charset="0"/>
+              <a:buChar char="•"/>
             </a:pPr>
             <a:r>
-              <a:rPr lang="en-US" sz="3200" b="1" dirty="0"/>
+              <a:rPr lang="en-US" sz="2800" b="1" dirty="0">
+                <a:solidFill>
+                  <a:schemeClr val="bg1"/>
+                </a:solidFill>
+              </a:rPr>
               <a:t>Core Algorithmic &amp; Analytical Impact: </a:t>
             </a:r>
             <a:r>
-              <a:rPr lang="en-US" sz="3200" dirty="0"/>
+              <a:rPr lang="en-US" sz="2400" dirty="0">
+                <a:solidFill>
+                  <a:schemeClr val="bg1"/>
+                </a:solidFill>
+              </a:rPr>
               <a:t>The system integrates custom data structures, manual algorithms, and Pandas-driven analytics, validated through comprehensive testing to provide an efficient and scalable solution.</a:t>
             </a:r>
           </a:p>
         </p:txBody>
       </p:sp>
     </p:spTree>
+    <p:extLst>
+      <p:ext uri="{BB962C8B-B14F-4D97-AF65-F5344CB8AC3E}">
+        <p14:creationId xmlns:p14="http://schemas.microsoft.com/office/powerpoint/2010/main" val="876833965"/>
+      </p:ext>
+    </p:extLst>
   </p:cSld>
   <p:clrMapOvr>
     <a:masterClrMapping/>
   </p:clrMapOvr>
-  <mc:AlternateContent xmlns:mc="http://schemas.openxmlformats.org/markup-compatibility/2006" xmlns:p14="http://schemas.microsoft.com/office/powerpoint/2010/main">
-    <mc:Choice Requires="p14">
+  <mc:AlternateContent xmlns:mc="http://schemas.openxmlformats.org/markup-compatibility/2006">
+    <mc:Choice xmlns:p14="http://schemas.microsoft.com/office/powerpoint/2010/main" Requires="p14">
       <p:transition spd="med" p14:dur="700">
         <p:fade/>
       </p:transition>
     </mc:Choice>
-    <mc:Fallback xmlns="">
+    <mc:Fallback>
       <p:transition spd="med">
         <p:fade/>
       </p:transition>
@@ -10714,7 +10874,7 @@
                                           </p:stCondLst>
                                         </p:cTn>
                                         <p:tgtEl>
-                                          <p:spTgt spid="3"/>
+                                          <p:spTgt spid="2"/>
                                         </p:tgtEl>
                                         <p:attrNameLst>
                                           <p:attrName>style.visibility</p:attrName>
@@ -10728,7 +10888,7 @@
                                       <p:cBhvr>
                                         <p:cTn id="7" dur="1000"/>
                                         <p:tgtEl>
-                                          <p:spTgt spid="3"/>
+                                          <p:spTgt spid="2"/>
                                         </p:tgtEl>
                                       </p:cBhvr>
                                     </p:animEffect>
@@ -10763,7 +10923,7 @@
       </p:par>
     </p:tnLst>
     <p:bldLst>
-      <p:bldP spid="3" grpId="0"/>
+      <p:bldP spid="2" grpId="0"/>
     </p:bldLst>
   </p:timing>
 </p:sld>
@@ -10788,82 +10948,88 @@
       </p:grpSpPr>
       <p:sp>
         <p:nvSpPr>
-          <p:cNvPr id="2" name="Title"/>
-          <p:cNvSpPr/>
+          <p:cNvPr id="5" name="TextBox 4">
+            <a:extLst>
+              <a:ext uri="{FF2B5EF4-FFF2-40B4-BE49-F238E27FC236}">
+                <a16:creationId xmlns:a16="http://schemas.microsoft.com/office/drawing/2014/main" id="{1F676F02-7ABE-8ECA-04A5-CB247D767A5B}"/>
+              </a:ext>
+            </a:extLst>
+          </p:cNvPr>
+          <p:cNvSpPr txBox="1"/>
           <p:nvPr/>
         </p:nvSpPr>
         <p:spPr>
           <a:xfrm>
-            <a:off x="1200150" y="700000"/>
-            <a:ext cx="15887700" cy="900000"/>
+            <a:off x="907774" y="1469335"/>
+            <a:ext cx="9220200" cy="1107996"/>
           </a:xfrm>
           <a:prstGeom prst="rect">
             <a:avLst/>
           </a:prstGeom>
           <a:noFill/>
-          <a:ln>
-            <a:noFill/>
-          </a:ln>
         </p:spPr>
         <p:txBody>
-          <a:bodyPr wrap="square" lIns="0" tIns="0" rIns="0" bIns="0" anchor="t">
-            <a:noAutofit/>
+          <a:bodyPr wrap="square">
+            <a:spAutoFit/>
           </a:bodyPr>
           <a:lstStyle/>
           <a:p>
             <a:r>
-              <a:rPr lang="en-US" sz="5000" b="1" dirty="0">
+              <a:rPr lang="en-US" sz="6600" b="1" dirty="0">
                 <a:solidFill>
-                  <a:srgbClr val="193EB0"/>
+                  <a:schemeClr val="bg1"/>
                 </a:solidFill>
                 <a:latin typeface="Arial"/>
                 <a:ea typeface="Arial"/>
                 <a:cs typeface="Arial"/>
               </a:rPr>
-              <a:t>Q&amp;A</a:t>
+              <a:t>Q &amp; A</a:t>
             </a:r>
           </a:p>
         </p:txBody>
       </p:sp>
       <p:sp>
         <p:nvSpPr>
-          <p:cNvPr id="3" name="Content"/>
-          <p:cNvSpPr/>
+          <p:cNvPr id="2" name="TextBox 1">
+            <a:extLst>
+              <a:ext uri="{FF2B5EF4-FFF2-40B4-BE49-F238E27FC236}">
+                <a16:creationId xmlns:a16="http://schemas.microsoft.com/office/drawing/2014/main" id="{565CA3FC-6695-BB7D-353A-63E580A4E2A8}"/>
+              </a:ext>
+            </a:extLst>
+          </p:cNvPr>
+          <p:cNvSpPr txBox="1"/>
           <p:nvPr/>
         </p:nvSpPr>
         <p:spPr>
           <a:xfrm>
-            <a:off x="1200150" y="1900000"/>
-            <a:ext cx="15887700" cy="5119392"/>
+            <a:off x="1524000" y="4374059"/>
+            <a:ext cx="14173200" cy="769441"/>
           </a:xfrm>
           <a:prstGeom prst="rect">
             <a:avLst/>
           </a:prstGeom>
           <a:noFill/>
-          <a:ln>
-            <a:noFill/>
-          </a:ln>
         </p:spPr>
         <p:txBody>
-          <a:bodyPr wrap="square" lIns="0" tIns="0" rIns="0" bIns="0" anchor="ctr">
-            <a:normAutofit/>
+          <a:bodyPr wrap="square" rtlCol="0">
+            <a:spAutoFit/>
           </a:bodyPr>
           <a:lstStyle/>
           <a:p>
-            <a:pPr marL="457200" indent="-457200">
+            <a:pPr marL="571500" indent="-571500">
               <a:spcAft>
                 <a:spcPts val="1600"/>
               </a:spcAft>
               <a:buClr>
-                <a:srgbClr val="193EB0"/>
+                <a:schemeClr val="bg1"/>
               </a:buClr>
-              <a:buFont typeface="Arial"/>
-              <a:buChar char="●"/>
+              <a:buFont typeface="Wingdings" panose="05000000000000000000" pitchFamily="2" charset="2"/>
+              <a:buChar char="Ø"/>
             </a:pPr>
             <a:r>
-              <a:rPr lang="en-US" sz="4000" dirty="0">
+              <a:rPr lang="en-US" sz="4400" dirty="0">
                 <a:solidFill>
-                  <a:srgbClr val="404040"/>
+                  <a:schemeClr val="bg1"/>
                 </a:solidFill>
                 <a:latin typeface="Arial"/>
                 <a:ea typeface="Arial"/>
@@ -10875,17 +11041,22 @@
         </p:txBody>
       </p:sp>
     </p:spTree>
+    <p:extLst>
+      <p:ext uri="{BB962C8B-B14F-4D97-AF65-F5344CB8AC3E}">
+        <p14:creationId xmlns:p14="http://schemas.microsoft.com/office/powerpoint/2010/main" val="4223553984"/>
+      </p:ext>
+    </p:extLst>
   </p:cSld>
   <p:clrMapOvr>
     <a:masterClrMapping/>
   </p:clrMapOvr>
-  <mc:AlternateContent xmlns:mc="http://schemas.openxmlformats.org/markup-compatibility/2006" xmlns:p14="http://schemas.microsoft.com/office/powerpoint/2010/main">
-    <mc:Choice Requires="p14">
+  <mc:AlternateContent xmlns:mc="http://schemas.openxmlformats.org/markup-compatibility/2006">
+    <mc:Choice xmlns:p14="http://schemas.microsoft.com/office/powerpoint/2010/main" Requires="p14">
       <p:transition spd="med" p14:dur="700">
         <p:fade/>
       </p:transition>
     </mc:Choice>
-    <mc:Fallback xmlns="">
+    <mc:Fallback>
       <p:transition spd="med">
         <p:fade/>
       </p:transition>
@@ -10928,7 +11099,7 @@
                                           </p:stCondLst>
                                         </p:cTn>
                                         <p:tgtEl>
-                                          <p:spTgt spid="3"/>
+                                          <p:spTgt spid="2"/>
                                         </p:tgtEl>
                                         <p:attrNameLst>
                                           <p:attrName>style.visibility</p:attrName>
@@ -10940,9 +11111,9 @@
                                     </p:set>
                                     <p:animEffect transition="in" filter="wipe(left)">
                                       <p:cBhvr>
-                                        <p:cTn id="7" dur="750"/>
+                                        <p:cTn id="7" dur="1000"/>
                                         <p:tgtEl>
-                                          <p:spTgt spid="3"/>
+                                          <p:spTgt spid="2"/>
                                         </p:tgtEl>
                                       </p:cBhvr>
                                     </p:animEffect>
@@ -10977,7 +11148,7 @@
       </p:par>
     </p:tnLst>
     <p:bldLst>
-      <p:bldP spid="3" grpId="0"/>
+      <p:bldP spid="2" grpId="0"/>
     </p:bldLst>
   </p:timing>
 </p:sld>
